--- a/classes/parte-2-deep-learning/131-transfer-learning-con-cnns-preentrenadas/clase-131-transfer-learning-con-cnns-preentrenadas-presentacion.pptx
+++ b/classes/parte-2-deep-learning/131-transfer-learning-con-cnns-preentrenadas/clase-131-transfer-learning-con-cnns-preentrenadas-presentacion.pptx
@@ -4801,7 +4801,7 @@
                 </a:solidFill>
                 <a:latin typeface="Segoe UI"/>
               </a:rPr>
-              <a:t>Primer bloque ejecutable del notebook.</a:t>
+              <a:t>Carga las imágenes desde un directorio con una subcarpeta por clase e infiere las etiquetas automáticamente.</a:t>
             </a:r>
           </a:p>
         </p:txBody>
@@ -4888,7 +4888,292 @@
                 </a:solidFill>
                 <a:latin typeface="Courier New"/>
               </a:rPr>
-              <a:t># Imports y configuración inicial</a:t>
+              <a:t>from tensorflow import keras</a:t>
+            </a:r>
+          </a:p>
+          <a:p>
+            <a:pPr>
+              <a:defRPr sz="1200" b="0">
+                <a:solidFill>
+                  <a:srgbClr val="F8FAFC"/>
+                </a:solidFill>
+                <a:latin typeface="Courier New"/>
+              </a:defRPr>
+            </a:pPr>
+            <a:r>
+              <a:rPr sz="1200" b="0">
+                <a:solidFill>
+                  <a:srgbClr val="F8FAFC"/>
+                </a:solidFill>
+                <a:latin typeface="Courier New"/>
+              </a:rPr>
+              <a:t>from tensorflow.keras import layers</a:t>
+            </a:r>
+          </a:p>
+          <a:p>
+            <a:pPr>
+              <a:defRPr sz="1200" b="0">
+                <a:solidFill>
+                  <a:srgbClr val="F8FAFC"/>
+                </a:solidFill>
+                <a:latin typeface="Courier New"/>
+              </a:defRPr>
+            </a:pPr>
+            <a:r>
+              <a:rPr sz="1200" b="0">
+                <a:solidFill>
+                  <a:srgbClr val="F8FAFC"/>
+                </a:solidFill>
+                <a:latin typeface="Courier New"/>
+              </a:rPr>
+              <a:t>import numpy as np</a:t>
+            </a:r>
+          </a:p>
+          <a:p>
+            <a:pPr>
+              <a:defRPr sz="1200" b="0">
+                <a:solidFill>
+                  <a:srgbClr val="F8FAFC"/>
+                </a:solidFill>
+                <a:latin typeface="Courier New"/>
+              </a:defRPr>
+            </a:pPr>
+            <a:r>
+              <a:rPr sz="1200" b="0">
+                <a:solidFill>
+                  <a:srgbClr val="F8FAFC"/>
+                </a:solidFill>
+                <a:latin typeface="Courier New"/>
+              </a:rPr>
+              <a:t>keras.utils.set_random_seed(42)</a:t>
+            </a:r>
+          </a:p>
+          <a:p>
+            <a:pPr>
+              <a:defRPr sz="1200" b="0">
+                <a:solidFill>
+                  <a:srgbClr val="F8FAFC"/>
+                </a:solidFill>
+                <a:latin typeface="Courier New"/>
+              </a:defRPr>
+            </a:pPr>
+            <a:r>
+              <a:rPr sz="1200" b="0">
+                <a:solidFill>
+                  <a:srgbClr val="F8FAFC"/>
+                </a:solidFill>
+                <a:latin typeface="Courier New"/>
+              </a:rPr>
+              <a:t> </a:t>
+            </a:r>
+          </a:p>
+          <a:p>
+            <a:pPr>
+              <a:defRPr sz="1200" b="0">
+                <a:solidFill>
+                  <a:srgbClr val="F8FAFC"/>
+                </a:solidFill>
+                <a:latin typeface="Courier New"/>
+              </a:defRPr>
+            </a:pPr>
+            <a:r>
+              <a:rPr sz="1200" b="0">
+                <a:solidFill>
+                  <a:srgbClr val="F8FAFC"/>
+                </a:solidFill>
+                <a:latin typeface="Courier New"/>
+              </a:rPr>
+              <a:t>IMG_SIZE = (224, 224)</a:t>
+            </a:r>
+          </a:p>
+          <a:p>
+            <a:pPr>
+              <a:defRPr sz="1200" b="0">
+                <a:solidFill>
+                  <a:srgbClr val="F8FAFC"/>
+                </a:solidFill>
+                <a:latin typeface="Courier New"/>
+              </a:defRPr>
+            </a:pPr>
+            <a:r>
+              <a:rPr sz="1200" b="0">
+                <a:solidFill>
+                  <a:srgbClr val="F8FAFC"/>
+                </a:solidFill>
+                <a:latin typeface="Courier New"/>
+              </a:rPr>
+              <a:t>NUM_CLASSES = 5</a:t>
+            </a:r>
+          </a:p>
+          <a:p>
+            <a:pPr>
+              <a:defRPr sz="1200" b="0">
+                <a:solidFill>
+                  <a:srgbClr val="F8FAFC"/>
+                </a:solidFill>
+                <a:latin typeface="Courier New"/>
+              </a:defRPr>
+            </a:pPr>
+            <a:r>
+              <a:rPr sz="1200" b="0">
+                <a:solidFill>
+                  <a:srgbClr val="F8FAFC"/>
+                </a:solidFill>
+                <a:latin typeface="Courier New"/>
+              </a:rPr>
+              <a:t> </a:t>
+            </a:r>
+          </a:p>
+          <a:p>
+            <a:pPr>
+              <a:defRPr sz="1200" b="0">
+                <a:solidFill>
+                  <a:srgbClr val="F8FAFC"/>
+                </a:solidFill>
+                <a:latin typeface="Courier New"/>
+              </a:defRPr>
+            </a:pPr>
+            <a:r>
+              <a:rPr sz="1200" b="0">
+                <a:solidFill>
+                  <a:srgbClr val="F8FAFC"/>
+                </a:solidFill>
+                <a:latin typeface="Courier New"/>
+              </a:rPr>
+              <a:t># En la práctica (directorio flores/ con subcarpetas margarita/, rosa/, ...):</a:t>
+            </a:r>
+          </a:p>
+          <a:p>
+            <a:pPr>
+              <a:defRPr sz="1200" b="0">
+                <a:solidFill>
+                  <a:srgbClr val="F8FAFC"/>
+                </a:solidFill>
+                <a:latin typeface="Courier New"/>
+              </a:defRPr>
+            </a:pPr>
+            <a:r>
+              <a:rPr sz="1200" b="0">
+                <a:solidFill>
+                  <a:srgbClr val="F8FAFC"/>
+                </a:solidFill>
+                <a:latin typeface="Courier New"/>
+              </a:rPr>
+              <a:t># train_ds = keras.utils.image_dataset_from_directory(</a:t>
+            </a:r>
+          </a:p>
+          <a:p>
+            <a:pPr>
+              <a:defRPr sz="1200" b="0">
+                <a:solidFill>
+                  <a:srgbClr val="F8FAFC"/>
+                </a:solidFill>
+                <a:latin typeface="Courier New"/>
+              </a:defRPr>
+            </a:pPr>
+            <a:r>
+              <a:rPr sz="1200" b="0">
+                <a:solidFill>
+                  <a:srgbClr val="F8FAFC"/>
+                </a:solidFill>
+                <a:latin typeface="Courier New"/>
+              </a:rPr>
+              <a:t>#     "flores", validation_split=0.2, subset="training", seed=42,</a:t>
+            </a:r>
+          </a:p>
+          <a:p>
+            <a:pPr>
+              <a:defRPr sz="1200" b="0">
+                <a:solidFill>
+                  <a:srgbClr val="F8FAFC"/>
+                </a:solidFill>
+                <a:latin typeface="Courier New"/>
+              </a:defRPr>
+            </a:pPr>
+            <a:r>
+              <a:rPr sz="1200" b="0">
+                <a:solidFill>
+                  <a:srgbClr val="F8FAFC"/>
+                </a:solidFill>
+                <a:latin typeface="Courier New"/>
+              </a:rPr>
+              <a:t>#     image_size=IMG_SIZE, batch_size=32)</a:t>
+            </a:r>
+          </a:p>
+          <a:p>
+            <a:pPr>
+              <a:defRPr sz="1200" b="0">
+                <a:solidFill>
+                  <a:srgbClr val="F8FAFC"/>
+                </a:solidFill>
+                <a:latin typeface="Courier New"/>
+              </a:defRPr>
+            </a:pPr>
+            <a:r>
+              <a:rPr sz="1200" b="0">
+                <a:solidFill>
+                  <a:srgbClr val="F8FAFC"/>
+                </a:solidFill>
+                <a:latin typeface="Courier New"/>
+              </a:rPr>
+              <a:t># val_ds = keras.utils.image_dataset_from_directory(</a:t>
+            </a:r>
+          </a:p>
+          <a:p>
+            <a:pPr>
+              <a:defRPr sz="1200" b="0">
+                <a:solidFill>
+                  <a:srgbClr val="F8FAFC"/>
+                </a:solidFill>
+                <a:latin typeface="Courier New"/>
+              </a:defRPr>
+            </a:pPr>
+            <a:r>
+              <a:rPr sz="1200" b="0">
+                <a:solidFill>
+                  <a:srgbClr val="F8FAFC"/>
+                </a:solidFill>
+                <a:latin typeface="Courier New"/>
+              </a:rPr>
+              <a:t>#     "flores", validation_split=0.2, subset="validation", seed=42,</a:t>
+            </a:r>
+          </a:p>
+          <a:p>
+            <a:pPr>
+              <a:defRPr sz="1200" b="0">
+                <a:solidFill>
+                  <a:srgbClr val="F8FAFC"/>
+                </a:solidFill>
+                <a:latin typeface="Courier New"/>
+              </a:defRPr>
+            </a:pPr>
+            <a:r>
+              <a:rPr sz="1200" b="0">
+                <a:solidFill>
+                  <a:srgbClr val="F8FAFC"/>
+                </a:solidFill>
+                <a:latin typeface="Courier New"/>
+              </a:rPr>
+              <a:t>#     image_size=IMG_SIZE, batch_size=32)</a:t>
+            </a:r>
+          </a:p>
+          <a:p>
+            <a:pPr>
+              <a:defRPr sz="1200" b="0">
+                <a:solidFill>
+                  <a:srgbClr val="F8FAFC"/>
+                </a:solidFill>
+                <a:latin typeface="Courier New"/>
+              </a:defRPr>
+            </a:pPr>
+            <a:r>
+              <a:rPr sz="1200" b="0">
+                <a:solidFill>
+                  <a:srgbClr val="F8FAFC"/>
+                </a:solidFill>
+                <a:latin typeface="Courier New"/>
+              </a:rPr>
+              <a:t>print("image_dataset_from_directory infiere las clases de las subcarpetas")</a:t>
             </a:r>
           </a:p>
         </p:txBody>

--- a/classes/parte-2-deep-learning/131-transfer-learning-con-cnns-preentrenadas/clase-131-transfer-learning-con-cnns-preentrenadas-presentacion.pptx
+++ b/classes/parte-2-deep-learning/131-transfer-learning-con-cnns-preentrenadas/clase-131-transfer-learning-con-cnns-preentrenadas-presentacion.pptx
@@ -3272,7 +3272,7 @@
                 </a:solidFill>
                 <a:latin typeface="Segoe UI"/>
               </a:rPr>
-              <a:t>Parte: 2 — Deep Learning · Fuente: Géron, cap. 14 § Using Pretrained Models from Keras.  Duración estimada: 70 min.</a:t>
+              <a:t>Parte: 2 — Deep Learning · Fuente: Géron, cap. 14 § Using Pretrained Models from Keras.  Duración estimada: 70 min. · Nivel: Avanzado</a:t>
             </a:r>
           </a:p>
         </p:txBody>
@@ -3581,7 +3581,7 @@
                 </a:solidFill>
                 <a:latin typeface="Segoe UI"/>
               </a:rPr>
-              <a:t>Parte: 2 — Deep Learning · Fuente: Géron, cap. 14 § Using Pretrained Models from Keras.  Duración estimada: 70 min.</a:t>
+              <a:t>Parte: 2 — Deep Learning · Fuente: Géron, cap. 14 § Using Pretrained Models from Keras.  Duración estimada: 70 min. · Nivel: Avanzado</a:t>
             </a:r>
           </a:p>
         </p:txBody>
